--- a/PIE_가이드_中文.pptx
+++ b/PIE_가이드_中文.pptx
@@ -28256,7 +28256,7 @@
         </p:nvGraphicFramePr>
         <p:xfrm>
           <a:off x="640080" y="1143000"/>
-          <a:ext cx="10881360" cy="1481328"/>
+          <a:ext cx="10881360" cy="1773936"/>
         </p:xfrm>
         <a:graphic>
           <a:graphicData uri="http://schemas.openxmlformats.org/drawingml/2006/table">
@@ -28269,7 +28269,7 @@
                 <a:gridCol w="3627120"/>
                 <a:gridCol w="3627120"/>
               </a:tblGrid>
-              <a:tr h="296265">
+              <a:tr h="295656">
                 <a:tc>
                   <a:txBody>
                     <a:bodyPr/>
@@ -28337,7 +28337,7 @@
                   </a:tcPr>
                 </a:tc>
               </a:tr>
-              <a:tr h="296265">
+              <a:tr h="295656">
                 <a:tc>
                   <a:txBody>
                     <a:bodyPr/>
@@ -28420,7 +28420,7 @@
                   </a:tcPr>
                 </a:tc>
               </a:tr>
-              <a:tr h="296265">
+              <a:tr h="295656">
                 <a:tc>
                   <a:txBody>
                     <a:bodyPr/>
@@ -28503,7 +28503,7 @@
                   </a:tcPr>
                 </a:tc>
               </a:tr>
-              <a:tr h="296265">
+              <a:tr h="295656">
                 <a:tc>
                   <a:txBody>
                     <a:bodyPr/>
@@ -28586,7 +28586,7 @@
                   </a:tcPr>
                 </a:tc>
               </a:tr>
-              <a:tr h="296268">
+              <a:tr h="295656">
                 <a:tc>
                   <a:txBody>
                     <a:bodyPr/>
@@ -28658,7 +28658,7 @@
                           </a:solidFill>
                           <a:latin typeface="微软雅黑"/>
                         </a:rPr>
-                        <a:t>多台电脑共同累积同一标准工时时</a:t>
+                        <a:t>在同一工厂内共同累积时</a:t>
                       </a:r>
                     </a:p>
                   </a:txBody>
@@ -28669,6 +28669,98 @@
                   </a:tcPr>
                 </a:tc>
               </a:tr>
+              <a:tr h="295656">
+                <a:tc>
+                  <a:txBody>
+                    <a:bodyPr/>
+                    <a:lstStyle/>
+                    <a:p>
+                      <a:pPr>
+                        <a:lnSpc>
+                          <a:spcPct val="95000"/>
+                        </a:lnSpc>
+                      </a:pPr>
+                      <a:r>
+                        <a:rPr sz="1100" b="0">
+                          <a:solidFill>
+                            <a:srgbClr val="111827"/>
+                          </a:solidFill>
+                          <a:latin typeface="微软雅黑"/>
+                        </a:rPr>
+                        <a:t>设置 &gt; 共享存储 &gt; 📊 谷歌表格</a:t>
+                      </a:r>
+                    </a:p>
+                  </a:txBody>
+                  <a:tcPr marL="54864" marR="54864" marT="18288" marB="18288">
+                    <a:solidFill>
+                      <a:srgbClr val="F1F5F9"/>
+                    </a:solidFill>
+                  </a:tcPr>
+                </a:tc>
+                <a:tc>
+                  <a:txBody>
+                    <a:bodyPr/>
+                    <a:lstStyle/>
+                    <a:p>
+                      <a:pPr>
+                        <a:lnSpc>
+                          <a:spcPct val="95000"/>
+                        </a:lnSpc>
+                      </a:pPr>
+                      <a:r>
+                        <a:rPr sz="1100" b="0">
+                          <a:solidFill>
+                            <a:srgbClr val="111827"/>
+                          </a:solidFill>
+                          <a:latin typeface="微软雅黑"/>
+                        </a:rPr>
+                        <a:t>谷歌电子表格</a:t>
+                      </a:r>
+                    </a:p>
+                  </a:txBody>
+                  <a:tcPr marL="54864" marR="54864" marT="18288" marB="18288">
+                    <a:solidFill>
+                      <a:srgbClr val="F1F5F9"/>
+                    </a:solidFill>
+                  </a:tcPr>
+                </a:tc>
+                <a:tc>
+                  <a:txBody>
+                    <a:bodyPr/>
+                    <a:lstStyle/>
+                    <a:p>
+                      <a:pPr>
+                        <a:lnSpc>
+                          <a:spcPct val="95000"/>
+                        </a:lnSpc>
+                      </a:pPr>
+                      <a:r>
+                        <a:rPr sz="1100" b="1">
+                          <a:solidFill>
+                            <a:srgbClr val="111827"/>
+                          </a:solidFill>
+                          <a:latin typeface="微软雅黑"/>
+                        </a:rPr>
+                        <a:t>不同地区之间共享时</a:t>
+                      </a:r>
+                      <a:r>
+                        <a:rPr sz="1100" b="0">
+                          <a:solidFill>
+                            <a:srgbClr val="111827"/>
+                          </a:solidFill>
+                          <a:latin typeface="微软雅黑"/>
+                        </a:rPr>
+                        <a:t>(需要互联网)</a:t>
+                      </a:r>
+                    </a:p>
+                  </a:txBody>
+                  <a:tcPr marL="54864" marR="54864" marT="18288" marB="18288">
+                    <a:solidFill>
+                      <a:srgbClr val="F1F5F9"/>
+                    </a:solidFill>
+                  </a:tcPr>
+                </a:tc>
+              </a:tr>
             </a:tbl>
           </a:graphicData>
         </a:graphic>
@@ -28681,7 +28773,7 @@
         </p:nvSpPr>
         <p:spPr>
           <a:xfrm>
-            <a:off x="640080" y="2852928"/>
+            <a:off x="640080" y="3145536"/>
             <a:ext cx="10881360" cy="566928"/>
           </a:xfrm>
           <a:prstGeom prst="roundRect">
@@ -28729,7 +28821,7 @@
         </p:nvSpPr>
         <p:spPr>
           <a:xfrm>
-            <a:off x="822960" y="2852928"/>
+            <a:off x="822960" y="3145536"/>
             <a:ext cx="10515600" cy="566928"/>
           </a:xfrm>
           <a:prstGeom prst="rect">

--- a/PIE_가이드_中文.pptx
+++ b/PIE_가이드_中文.pptx
@@ -29469,7 +29469,7 @@
                           </a:solidFill>
                           <a:latin typeface="微软雅黑"/>
                         </a:rPr>
-                        <a:t>PIE(중국).bat</a:t>
+                        <a:t>PIE 실행.bat</a:t>
                       </a:r>
                       <a:r>
                         <a:rPr sz="1100" b="0">
@@ -32567,7 +32567,7 @@
                 </a:solidFill>
                 <a:latin typeface="微软雅黑"/>
               </a:rPr>
-              <a:t>PIE(중국).bat</a:t>
+              <a:t>PIE 실행.bat</a:t>
             </a:r>
             <a:r>
               <a:rPr sz="1300" b="0">
@@ -32847,7 +32847,7 @@
                 </a:solidFill>
                 <a:latin typeface="微软雅黑"/>
               </a:rPr>
-              <a:t>双击 PIE(중국).bat</a:t>
+              <a:t>双击 PIE 실행.bat</a:t>
             </a:r>
           </a:p>
         </p:txBody>
@@ -33676,7 +33676,7 @@
                 </a:solidFill>
                 <a:latin typeface="微软雅黑"/>
               </a:rPr>
-              <a:t>PIE(중국).bat</a:t>
+              <a:t>PIE 실행.bat</a:t>
             </a:r>
             <a:r>
               <a:rPr sz="1300" b="0">
